--- a/u07a_linkedLists/notes/__a_Java's LinkedList class.pptx
+++ b/u07a_linkedLists/notes/__a_Java's LinkedList class.pptx
@@ -18527,6 +18527,14 @@
 <file path=ppt/slides/slide25.xml><?xml version="1.0" encoding="utf-8"?>
 <p:sld xmlns:a="http://schemas.openxmlformats.org/drawingml/2006/main" xmlns:r="http://schemas.openxmlformats.org/officeDocument/2006/relationships" xmlns:p="http://schemas.openxmlformats.org/presentationml/2006/main">
   <p:cSld>
+    <p:bg>
+      <p:bgPr>
+        <a:solidFill>
+          <a:srgbClr val="F2F2F2"/>
+        </a:solidFill>
+        <a:effectLst/>
+      </p:bgPr>
+    </p:bg>
     <p:spTree>
       <p:nvGrpSpPr>
         <p:cNvPr id="1" name=""/>
@@ -18541,9 +18549,86 @@
           <a:chExt cx="0" cy="0"/>
         </a:xfrm>
       </p:grpSpPr>
+      <p:pic>
+        <p:nvPicPr>
+          <p:cNvPr id="1026" name="Picture 2" descr="SplDoublyLinkedList in PHP - GeeksforGeeks">
+            <a:extLst>
+              <a:ext uri="{FF2B5EF4-FFF2-40B4-BE49-F238E27FC236}">
+                <a16:creationId xmlns:a16="http://schemas.microsoft.com/office/drawing/2014/main" id="{F4F1BC99-B670-272F-A9CE-40932CEC8CED}"/>
+              </a:ext>
+            </a:extLst>
+          </p:cNvPr>
+          <p:cNvPicPr>
+            <a:picLocks noChangeAspect="1" noChangeArrowheads="1"/>
+          </p:cNvPicPr>
+          <p:nvPr/>
+        </p:nvPicPr>
+        <p:blipFill rotWithShape="1">
+          <a:blip r:embed="rId3">
+            <a:extLst>
+              <a:ext uri="{28A0092B-C50C-407E-A947-70E740481C1C}">
+                <a14:useLocalDpi xmlns:a14="http://schemas.microsoft.com/office/drawing/2010/main" val="0"/>
+              </a:ext>
+            </a:extLst>
+          </a:blip>
+          <a:srcRect l="3119" t="14561" r="9454" b="31141"/>
+          <a:stretch>
+            <a:fillRect/>
+          </a:stretch>
+        </p:blipFill>
+        <p:spPr bwMode="auto">
+          <a:xfrm>
+            <a:off x="9647582" y="4674965"/>
+            <a:ext cx="8978796" cy="1135527"/>
+          </a:xfrm>
+          <a:prstGeom prst="rect">
+            <a:avLst/>
+          </a:prstGeom>
+          <a:noFill/>
+          <a:extLst>
+            <a:ext uri="{909E8E84-426E-40DD-AFC4-6F175D3DCCD1}">
+              <a14:hiddenFill xmlns:a14="http://schemas.microsoft.com/office/drawing/2010/main">
+                <a:solidFill>
+                  <a:srgbClr val="FFFFFF"/>
+                </a:solidFill>
+              </a14:hiddenFill>
+            </a:ext>
+          </a:extLst>
+        </p:spPr>
+      </p:pic>
+      <p:pic>
+        <p:nvPicPr>
+          <p:cNvPr id="6" name="Picture 5">
+            <a:extLst>
+              <a:ext uri="{FF2B5EF4-FFF2-40B4-BE49-F238E27FC236}">
+                <a16:creationId xmlns:a16="http://schemas.microsoft.com/office/drawing/2014/main" id="{F6FBAC21-65CD-D305-F191-08A174D9D3AA}"/>
+              </a:ext>
+            </a:extLst>
+          </p:cNvPr>
+          <p:cNvPicPr>
+            <a:picLocks noChangeAspect="1"/>
+          </p:cNvPicPr>
+          <p:nvPr/>
+        </p:nvPicPr>
+        <p:blipFill>
+          <a:blip r:embed="rId4"/>
+          <a:stretch>
+            <a:fillRect/>
+          </a:stretch>
+        </p:blipFill>
+        <p:spPr>
+          <a:xfrm>
+            <a:off x="1410152" y="137090"/>
+            <a:ext cx="6027876" cy="2477365"/>
+          </a:xfrm>
+          <a:prstGeom prst="rect">
+            <a:avLst/>
+          </a:prstGeom>
+        </p:spPr>
+      </p:pic>
       <p:sp>
         <p:nvSpPr>
-          <p:cNvPr id="58371" name="WordArt 2">
+          <p:cNvPr id="7" name="WordArt 2">
             <a:extLst>
               <a:ext uri="{FF2B5EF4-FFF2-40B4-BE49-F238E27FC236}">
                 <a16:creationId xmlns:a16="http://schemas.microsoft.com/office/drawing/2014/main" id="{E8CF4223-EC93-4AA1-BDDA-B3B744CD3057}"/>
@@ -18557,8 +18642,8 @@
         </p:nvSpPr>
         <p:spPr bwMode="auto">
           <a:xfrm>
-            <a:off x="1749631" y="321622"/>
-            <a:ext cx="5105400" cy="685799"/>
+            <a:off x="5336275" y="137090"/>
+            <a:ext cx="3630304" cy="487652"/>
           </a:xfrm>
           <a:prstGeom prst="rect">
             <a:avLst/>
@@ -18602,7 +18687,7 @@
       </p:sp>
       <p:sp>
         <p:nvSpPr>
-          <p:cNvPr id="58372" name="Text Box 3">
+          <p:cNvPr id="8" name="Text Box 3">
             <a:extLst>
               <a:ext uri="{FF2B5EF4-FFF2-40B4-BE49-F238E27FC236}">
                 <a16:creationId xmlns:a16="http://schemas.microsoft.com/office/drawing/2014/main" id="{5F847F85-EF15-4560-A925-1D1465D2B3B1}"/>
@@ -18616,8 +18701,8 @@
         </p:nvSpPr>
         <p:spPr bwMode="auto">
           <a:xfrm>
-            <a:off x="228600" y="1447800"/>
-            <a:ext cx="8686800" cy="4647426"/>
+            <a:off x="372923" y="2576219"/>
+            <a:ext cx="5827643" cy="3970318"/>
           </a:xfrm>
           <a:prstGeom prst="rect">
             <a:avLst/>
@@ -18783,26 +18868,6 @@
             </a:lvl9pPr>
           </a:lstStyle>
           <a:p>
-            <a:pPr algn="ctr" eaLnBrk="1" hangingPunct="1">
-              <a:spcBef>
-                <a:spcPct val="50000"/>
-              </a:spcBef>
-              <a:buNone/>
-            </a:pPr>
-            <a:r>
-              <a:rPr lang="en-US" altLang="en-US" sz="2400" b="1" dirty="0">
-                <a:solidFill>
-                  <a:schemeClr val="accent2"/>
-                </a:solidFill>
-                <a:latin typeface="Tahoma" panose="020B0604030504040204" pitchFamily="34" charset="0"/>
-              </a:rPr>
-              <a:t>Java’s LinkedList class is a doubly-linked list.</a:t>
-            </a:r>
-            <a:endParaRPr lang="en-US" altLang="en-US" sz="1600" b="1" dirty="0">
-              <a:latin typeface="Tahoma" panose="020B0604030504040204" pitchFamily="34" charset="0"/>
-            </a:endParaRPr>
-          </a:p>
-          <a:p>
             <a:pPr eaLnBrk="1" hangingPunct="1">
               <a:spcBef>
                 <a:spcPts val="2400"/>
@@ -18812,6 +18877,11 @@
             </a:pPr>
             <a:r>
               <a:rPr lang="en-US" altLang="en-US" sz="2400" b="1" dirty="0">
+                <a:solidFill>
+                  <a:schemeClr val="accent2">
+                    <a:lumMod val="75000"/>
+                  </a:schemeClr>
+                </a:solidFill>
                 <a:latin typeface="Tahoma" panose="020B0604030504040204" pitchFamily="34" charset="0"/>
               </a:rPr>
               <a:t>traverse all nodes			O(N)</a:t>
@@ -18827,6 +18897,11 @@
             </a:pPr>
             <a:r>
               <a:rPr lang="en-US" altLang="en-US" sz="2400" b="1" dirty="0">
+                <a:solidFill>
+                  <a:schemeClr val="accent2">
+                    <a:lumMod val="75000"/>
+                  </a:schemeClr>
+                </a:solidFill>
                 <a:latin typeface="Tahoma" panose="020B0604030504040204" pitchFamily="34" charset="0"/>
               </a:rPr>
               <a:t>search for an item		O(N)</a:t>
@@ -18842,17 +18917,32 @@
             </a:pPr>
             <a:r>
               <a:rPr lang="en-US" altLang="en-US" sz="2400" b="1" dirty="0">
+                <a:solidFill>
+                  <a:schemeClr val="accent2">
+                    <a:lumMod val="75000"/>
+                  </a:schemeClr>
+                </a:solidFill>
                 <a:latin typeface="Tahoma" panose="020B0604030504040204" pitchFamily="34" charset="0"/>
               </a:rPr>
               <a:t>remove any item			O(N)	</a:t>
             </a:r>
             <a:br>
               <a:rPr lang="en-US" altLang="en-US" sz="2400" b="1" dirty="0">
+                <a:solidFill>
+                  <a:schemeClr val="accent2">
+                    <a:lumMod val="75000"/>
+                  </a:schemeClr>
+                </a:solidFill>
                 <a:latin typeface="Tahoma" panose="020B0604030504040204" pitchFamily="34" charset="0"/>
               </a:rPr>
             </a:br>
             <a:r>
               <a:rPr lang="en-US" altLang="en-US" sz="2400" b="1" dirty="0">
+                <a:solidFill>
+                  <a:schemeClr val="accent2">
+                    <a:lumMod val="75000"/>
+                  </a:schemeClr>
+                </a:solidFill>
                 <a:latin typeface="Tahoma" panose="020B0604030504040204" pitchFamily="34" charset="0"/>
               </a:rPr>
               <a:t>   location unknown</a:t>
@@ -18868,17 +18958,32 @@
             </a:pPr>
             <a:r>
               <a:rPr lang="en-US" altLang="en-US" sz="2400" b="1" dirty="0">
+                <a:solidFill>
+                  <a:schemeClr val="accent2">
+                    <a:lumMod val="75000"/>
+                  </a:schemeClr>
+                </a:solidFill>
                 <a:latin typeface="Tahoma" panose="020B0604030504040204" pitchFamily="34" charset="0"/>
               </a:rPr>
               <a:t>get any item			O(N)	</a:t>
             </a:r>
             <a:br>
               <a:rPr lang="en-US" altLang="en-US" sz="2400" b="1" dirty="0">
+                <a:solidFill>
+                  <a:schemeClr val="accent2">
+                    <a:lumMod val="75000"/>
+                  </a:schemeClr>
+                </a:solidFill>
                 <a:latin typeface="Tahoma" panose="020B0604030504040204" pitchFamily="34" charset="0"/>
               </a:rPr>
             </a:br>
             <a:r>
               <a:rPr lang="en-US" altLang="en-US" sz="2400" b="1" dirty="0">
+                <a:solidFill>
+                  <a:schemeClr val="accent2">
+                    <a:lumMod val="75000"/>
+                  </a:schemeClr>
+                </a:solidFill>
                 <a:latin typeface="Tahoma" panose="020B0604030504040204" pitchFamily="34" charset="0"/>
               </a:rPr>
               <a:t>   location unknown</a:t>
@@ -18894,6 +18999,11 @@
             </a:pPr>
             <a:r>
               <a:rPr lang="en-US" altLang="en-US" sz="2400" b="1" dirty="0">
+                <a:solidFill>
+                  <a:schemeClr val="accent2">
+                    <a:lumMod val="75000"/>
+                  </a:schemeClr>
+                </a:solidFill>
                 <a:latin typeface="Tahoma" panose="020B0604030504040204" pitchFamily="34" charset="0"/>
               </a:rPr>
               <a:t>add item at the end		O(1)	</a:t>
@@ -18909,1162 +19019,23 @@
             </a:pPr>
             <a:r>
               <a:rPr lang="en-US" altLang="en-US" sz="2400" b="1" dirty="0">
+                <a:solidFill>
+                  <a:schemeClr val="accent2">
+                    <a:lumMod val="75000"/>
+                  </a:schemeClr>
+                </a:solidFill>
                 <a:latin typeface="Tahoma" panose="020B0604030504040204" pitchFamily="34" charset="0"/>
               </a:rPr>
               <a:t>add item at the front		O(1)</a:t>
             </a:r>
             <a:endParaRPr lang="en-US" altLang="en-US" sz="2800" b="1" dirty="0">
+              <a:solidFill>
+                <a:schemeClr val="accent2">
+                  <a:lumMod val="75000"/>
+                </a:schemeClr>
+              </a:solidFill>
               <a:latin typeface="Tahoma" panose="020B0604030504040204" pitchFamily="34" charset="0"/>
             </a:endParaRPr>
-          </a:p>
-        </p:txBody>
-      </p:sp>
-      <p:sp>
-        <p:nvSpPr>
-          <p:cNvPr id="86021" name="Rectangle 5">
-            <a:extLst>
-              <a:ext uri="{FF2B5EF4-FFF2-40B4-BE49-F238E27FC236}">
-                <a16:creationId xmlns:a16="http://schemas.microsoft.com/office/drawing/2014/main" id="{EC87CE93-1E62-4BF5-9BE2-1F2EFBA66F9C}"/>
-              </a:ext>
-            </a:extLst>
-          </p:cNvPr>
-          <p:cNvSpPr>
-            <a:spLocks noChangeArrowheads="1"/>
-          </p:cNvSpPr>
-          <p:nvPr/>
-        </p:nvSpPr>
-        <p:spPr bwMode="auto">
-          <a:xfrm>
-            <a:off x="6781800" y="4572000"/>
-            <a:ext cx="1295400" cy="533400"/>
-          </a:xfrm>
-          <a:prstGeom prst="rect">
-            <a:avLst/>
-          </a:prstGeom>
-          <a:solidFill>
-            <a:srgbClr val="CCFFFF"/>
-          </a:solidFill>
-          <a:ln w="12700">
-            <a:solidFill>
-              <a:schemeClr val="tx1"/>
-            </a:solidFill>
-            <a:miter lim="800000"/>
-            <a:headEnd type="none" w="sm" len="sm"/>
-            <a:tailEnd type="none" w="sm" len="sm"/>
-          </a:ln>
-          <a:effectLst/>
-          <a:extLst>
-            <a:ext uri="{AF507438-7753-43E0-B8FC-AC1667EBCBE1}">
-              <a14:hiddenEffects xmlns:a14="http://schemas.microsoft.com/office/drawing/2010/main">
-                <a:effectLst>
-                  <a:outerShdw dist="35921" dir="2700000" algn="ctr" rotWithShape="0">
-                    <a:schemeClr val="bg2"/>
-                  </a:outerShdw>
-                </a:effectLst>
-              </a14:hiddenEffects>
-            </a:ext>
-          </a:extLst>
-        </p:spPr>
-        <p:txBody>
-          <a:bodyPr wrap="none" anchor="ctr"/>
-          <a:lstStyle>
-            <a:lvl1pPr>
-              <a:spcBef>
-                <a:spcPct val="20000"/>
-              </a:spcBef>
-              <a:buChar char="•"/>
-              <a:defRPr sz="3200">
-                <a:solidFill>
-                  <a:schemeClr val="tx1"/>
-                </a:solidFill>
-                <a:latin typeface="Times New Roman" panose="02020603050405020304" pitchFamily="18" charset="0"/>
-              </a:defRPr>
-            </a:lvl1pPr>
-            <a:lvl2pPr marL="742950" indent="-285750">
-              <a:spcBef>
-                <a:spcPct val="20000"/>
-              </a:spcBef>
-              <a:buChar char="–"/>
-              <a:defRPr sz="2800">
-                <a:solidFill>
-                  <a:schemeClr val="tx1"/>
-                </a:solidFill>
-                <a:latin typeface="Times New Roman" panose="02020603050405020304" pitchFamily="18" charset="0"/>
-              </a:defRPr>
-            </a:lvl2pPr>
-            <a:lvl3pPr marL="1143000" indent="-228600">
-              <a:spcBef>
-                <a:spcPct val="20000"/>
-              </a:spcBef>
-              <a:buChar char="•"/>
-              <a:defRPr sz="2400">
-                <a:solidFill>
-                  <a:schemeClr val="tx1"/>
-                </a:solidFill>
-                <a:latin typeface="Times New Roman" panose="02020603050405020304" pitchFamily="18" charset="0"/>
-              </a:defRPr>
-            </a:lvl3pPr>
-            <a:lvl4pPr marL="1600200" indent="-228600">
-              <a:spcBef>
-                <a:spcPct val="20000"/>
-              </a:spcBef>
-              <a:buChar char="–"/>
-              <a:defRPr sz="2000">
-                <a:solidFill>
-                  <a:schemeClr val="tx1"/>
-                </a:solidFill>
-                <a:latin typeface="Times New Roman" panose="02020603050405020304" pitchFamily="18" charset="0"/>
-              </a:defRPr>
-            </a:lvl4pPr>
-            <a:lvl5pPr marL="2057400" indent="-228600">
-              <a:spcBef>
-                <a:spcPct val="20000"/>
-              </a:spcBef>
-              <a:buChar char="•"/>
-              <a:defRPr sz="2000">
-                <a:solidFill>
-                  <a:schemeClr val="tx1"/>
-                </a:solidFill>
-                <a:latin typeface="Times New Roman" panose="02020603050405020304" pitchFamily="18" charset="0"/>
-              </a:defRPr>
-            </a:lvl5pPr>
-            <a:lvl6pPr marL="2514600" indent="-228600" eaLnBrk="0" fontAlgn="base" hangingPunct="0">
-              <a:spcBef>
-                <a:spcPct val="20000"/>
-              </a:spcBef>
-              <a:spcAft>
-                <a:spcPct val="0"/>
-              </a:spcAft>
-              <a:buChar char="•"/>
-              <a:defRPr sz="2000">
-                <a:solidFill>
-                  <a:schemeClr val="tx1"/>
-                </a:solidFill>
-                <a:latin typeface="Times New Roman" panose="02020603050405020304" pitchFamily="18" charset="0"/>
-              </a:defRPr>
-            </a:lvl6pPr>
-            <a:lvl7pPr marL="2971800" indent="-228600" eaLnBrk="0" fontAlgn="base" hangingPunct="0">
-              <a:spcBef>
-                <a:spcPct val="20000"/>
-              </a:spcBef>
-              <a:spcAft>
-                <a:spcPct val="0"/>
-              </a:spcAft>
-              <a:buChar char="•"/>
-              <a:defRPr sz="2000">
-                <a:solidFill>
-                  <a:schemeClr val="tx1"/>
-                </a:solidFill>
-                <a:latin typeface="Times New Roman" panose="02020603050405020304" pitchFamily="18" charset="0"/>
-              </a:defRPr>
-            </a:lvl7pPr>
-            <a:lvl8pPr marL="3429000" indent="-228600" eaLnBrk="0" fontAlgn="base" hangingPunct="0">
-              <a:spcBef>
-                <a:spcPct val="20000"/>
-              </a:spcBef>
-              <a:spcAft>
-                <a:spcPct val="0"/>
-              </a:spcAft>
-              <a:buChar char="•"/>
-              <a:defRPr sz="2000">
-                <a:solidFill>
-                  <a:schemeClr val="tx1"/>
-                </a:solidFill>
-                <a:latin typeface="Times New Roman" panose="02020603050405020304" pitchFamily="18" charset="0"/>
-              </a:defRPr>
-            </a:lvl8pPr>
-            <a:lvl9pPr marL="3886200" indent="-228600" eaLnBrk="0" fontAlgn="base" hangingPunct="0">
-              <a:spcBef>
-                <a:spcPct val="20000"/>
-              </a:spcBef>
-              <a:spcAft>
-                <a:spcPct val="0"/>
-              </a:spcAft>
-              <a:buChar char="•"/>
-              <a:defRPr sz="2000">
-                <a:solidFill>
-                  <a:schemeClr val="tx1"/>
-                </a:solidFill>
-                <a:latin typeface="Times New Roman" panose="02020603050405020304" pitchFamily="18" charset="0"/>
-              </a:defRPr>
-            </a:lvl9pPr>
-          </a:lstStyle>
-          <a:p>
-            <a:pPr algn="ctr" eaLnBrk="1" hangingPunct="1">
-              <a:spcBef>
-                <a:spcPct val="0"/>
-              </a:spcBef>
-              <a:buFontTx/>
-              <a:buNone/>
-            </a:pPr>
-            <a:endParaRPr lang="en-US" altLang="en-US" sz="2400">
-              <a:latin typeface="Tahoma" panose="020B0604030504040204" pitchFamily="34" charset="0"/>
-            </a:endParaRPr>
-          </a:p>
-        </p:txBody>
-      </p:sp>
-      <p:sp>
-        <p:nvSpPr>
-          <p:cNvPr id="86022" name="Rectangle 6">
-            <a:extLst>
-              <a:ext uri="{FF2B5EF4-FFF2-40B4-BE49-F238E27FC236}">
-                <a16:creationId xmlns:a16="http://schemas.microsoft.com/office/drawing/2014/main" id="{764004CD-0984-45B7-9908-5E41CAD2A166}"/>
-              </a:ext>
-            </a:extLst>
-          </p:cNvPr>
-          <p:cNvSpPr>
-            <a:spLocks noChangeArrowheads="1"/>
-          </p:cNvSpPr>
-          <p:nvPr/>
-        </p:nvSpPr>
-        <p:spPr bwMode="auto">
-          <a:xfrm>
-            <a:off x="7848600" y="4572000"/>
-            <a:ext cx="520700" cy="533400"/>
-          </a:xfrm>
-          <a:prstGeom prst="rect">
-            <a:avLst/>
-          </a:prstGeom>
-          <a:solidFill>
-            <a:srgbClr val="CCFFCC"/>
-          </a:solidFill>
-          <a:ln w="12700">
-            <a:solidFill>
-              <a:schemeClr val="tx1"/>
-            </a:solidFill>
-            <a:miter lim="800000"/>
-            <a:headEnd type="none" w="sm" len="sm"/>
-            <a:tailEnd type="none" w="sm" len="sm"/>
-          </a:ln>
-          <a:effectLst/>
-          <a:extLst>
-            <a:ext uri="{AF507438-7753-43E0-B8FC-AC1667EBCBE1}">
-              <a14:hiddenEffects xmlns:a14="http://schemas.microsoft.com/office/drawing/2010/main">
-                <a:effectLst>
-                  <a:outerShdw dist="35921" dir="2700000" algn="ctr" rotWithShape="0">
-                    <a:schemeClr val="bg2"/>
-                  </a:outerShdw>
-                </a:effectLst>
-              </a14:hiddenEffects>
-            </a:ext>
-          </a:extLst>
-        </p:spPr>
-        <p:txBody>
-          <a:bodyPr wrap="none" anchor="ctr"/>
-          <a:lstStyle>
-            <a:lvl1pPr>
-              <a:spcBef>
-                <a:spcPct val="20000"/>
-              </a:spcBef>
-              <a:buChar char="•"/>
-              <a:defRPr sz="3200">
-                <a:solidFill>
-                  <a:schemeClr val="tx1"/>
-                </a:solidFill>
-                <a:latin typeface="Times New Roman" panose="02020603050405020304" pitchFamily="18" charset="0"/>
-              </a:defRPr>
-            </a:lvl1pPr>
-            <a:lvl2pPr marL="742950" indent="-285750">
-              <a:spcBef>
-                <a:spcPct val="20000"/>
-              </a:spcBef>
-              <a:buChar char="–"/>
-              <a:defRPr sz="2800">
-                <a:solidFill>
-                  <a:schemeClr val="tx1"/>
-                </a:solidFill>
-                <a:latin typeface="Times New Roman" panose="02020603050405020304" pitchFamily="18" charset="0"/>
-              </a:defRPr>
-            </a:lvl2pPr>
-            <a:lvl3pPr marL="1143000" indent="-228600">
-              <a:spcBef>
-                <a:spcPct val="20000"/>
-              </a:spcBef>
-              <a:buChar char="•"/>
-              <a:defRPr sz="2400">
-                <a:solidFill>
-                  <a:schemeClr val="tx1"/>
-                </a:solidFill>
-                <a:latin typeface="Times New Roman" panose="02020603050405020304" pitchFamily="18" charset="0"/>
-              </a:defRPr>
-            </a:lvl3pPr>
-            <a:lvl4pPr marL="1600200" indent="-228600">
-              <a:spcBef>
-                <a:spcPct val="20000"/>
-              </a:spcBef>
-              <a:buChar char="–"/>
-              <a:defRPr sz="2000">
-                <a:solidFill>
-                  <a:schemeClr val="tx1"/>
-                </a:solidFill>
-                <a:latin typeface="Times New Roman" panose="02020603050405020304" pitchFamily="18" charset="0"/>
-              </a:defRPr>
-            </a:lvl4pPr>
-            <a:lvl5pPr marL="2057400" indent="-228600">
-              <a:spcBef>
-                <a:spcPct val="20000"/>
-              </a:spcBef>
-              <a:buChar char="•"/>
-              <a:defRPr sz="2000">
-                <a:solidFill>
-                  <a:schemeClr val="tx1"/>
-                </a:solidFill>
-                <a:latin typeface="Times New Roman" panose="02020603050405020304" pitchFamily="18" charset="0"/>
-              </a:defRPr>
-            </a:lvl5pPr>
-            <a:lvl6pPr marL="2514600" indent="-228600" eaLnBrk="0" fontAlgn="base" hangingPunct="0">
-              <a:spcBef>
-                <a:spcPct val="20000"/>
-              </a:spcBef>
-              <a:spcAft>
-                <a:spcPct val="0"/>
-              </a:spcAft>
-              <a:buChar char="•"/>
-              <a:defRPr sz="2000">
-                <a:solidFill>
-                  <a:schemeClr val="tx1"/>
-                </a:solidFill>
-                <a:latin typeface="Times New Roman" panose="02020603050405020304" pitchFamily="18" charset="0"/>
-              </a:defRPr>
-            </a:lvl6pPr>
-            <a:lvl7pPr marL="2971800" indent="-228600" eaLnBrk="0" fontAlgn="base" hangingPunct="0">
-              <a:spcBef>
-                <a:spcPct val="20000"/>
-              </a:spcBef>
-              <a:spcAft>
-                <a:spcPct val="0"/>
-              </a:spcAft>
-              <a:buChar char="•"/>
-              <a:defRPr sz="2000">
-                <a:solidFill>
-                  <a:schemeClr val="tx1"/>
-                </a:solidFill>
-                <a:latin typeface="Times New Roman" panose="02020603050405020304" pitchFamily="18" charset="0"/>
-              </a:defRPr>
-            </a:lvl7pPr>
-            <a:lvl8pPr marL="3429000" indent="-228600" eaLnBrk="0" fontAlgn="base" hangingPunct="0">
-              <a:spcBef>
-                <a:spcPct val="20000"/>
-              </a:spcBef>
-              <a:spcAft>
-                <a:spcPct val="0"/>
-              </a:spcAft>
-              <a:buChar char="•"/>
-              <a:defRPr sz="2000">
-                <a:solidFill>
-                  <a:schemeClr val="tx1"/>
-                </a:solidFill>
-                <a:latin typeface="Times New Roman" panose="02020603050405020304" pitchFamily="18" charset="0"/>
-              </a:defRPr>
-            </a:lvl8pPr>
-            <a:lvl9pPr marL="3886200" indent="-228600" eaLnBrk="0" fontAlgn="base" hangingPunct="0">
-              <a:spcBef>
-                <a:spcPct val="20000"/>
-              </a:spcBef>
-              <a:spcAft>
-                <a:spcPct val="0"/>
-              </a:spcAft>
-              <a:buChar char="•"/>
-              <a:defRPr sz="2000">
-                <a:solidFill>
-                  <a:schemeClr val="tx1"/>
-                </a:solidFill>
-                <a:latin typeface="Times New Roman" panose="02020603050405020304" pitchFamily="18" charset="0"/>
-              </a:defRPr>
-            </a:lvl9pPr>
-          </a:lstStyle>
-          <a:p>
-            <a:pPr eaLnBrk="1" hangingPunct="1">
-              <a:spcBef>
-                <a:spcPct val="0"/>
-              </a:spcBef>
-              <a:buFontTx/>
-              <a:buNone/>
-            </a:pPr>
-            <a:endParaRPr lang="en-US" altLang="en-US" sz="2800">
-              <a:latin typeface="Tahoma" panose="020B0604030504040204" pitchFamily="34" charset="0"/>
-            </a:endParaRPr>
-          </a:p>
-        </p:txBody>
-      </p:sp>
-      <p:sp>
-        <p:nvSpPr>
-          <p:cNvPr id="86024" name="Text Box 8">
-            <a:extLst>
-              <a:ext uri="{FF2B5EF4-FFF2-40B4-BE49-F238E27FC236}">
-                <a16:creationId xmlns:a16="http://schemas.microsoft.com/office/drawing/2014/main" id="{6331EAE8-6DDC-4754-B5E4-B08705726FA8}"/>
-              </a:ext>
-            </a:extLst>
-          </p:cNvPr>
-          <p:cNvSpPr txBox="1">
-            <a:spLocks noChangeArrowheads="1"/>
-          </p:cNvSpPr>
-          <p:nvPr/>
-        </p:nvSpPr>
-        <p:spPr bwMode="auto">
-          <a:xfrm>
-            <a:off x="7315200" y="4648200"/>
-            <a:ext cx="609600" cy="396875"/>
-          </a:xfrm>
-          <a:prstGeom prst="rect">
-            <a:avLst/>
-          </a:prstGeom>
-          <a:noFill/>
-          <a:ln>
-            <a:noFill/>
-          </a:ln>
-          <a:effectLst/>
-          <a:extLst>
-            <a:ext uri="{909E8E84-426E-40DD-AFC4-6F175D3DCCD1}">
-              <a14:hiddenFill xmlns:a14="http://schemas.microsoft.com/office/drawing/2010/main">
-                <a:solidFill>
-                  <a:schemeClr val="accent1"/>
-                </a:solidFill>
-              </a14:hiddenFill>
-            </a:ext>
-            <a:ext uri="{91240B29-F687-4F45-9708-019B960494DF}">
-              <a14:hiddenLine xmlns:a14="http://schemas.microsoft.com/office/drawing/2010/main" w="12700">
-                <a:solidFill>
-                  <a:schemeClr val="tx1"/>
-                </a:solidFill>
-                <a:miter lim="800000"/>
-                <a:headEnd type="none" w="sm" len="sm"/>
-                <a:tailEnd type="none" w="sm" len="sm"/>
-              </a14:hiddenLine>
-            </a:ext>
-            <a:ext uri="{AF507438-7753-43E0-B8FC-AC1667EBCBE1}">
-              <a14:hiddenEffects xmlns:a14="http://schemas.microsoft.com/office/drawing/2010/main">
-                <a:effectLst>
-                  <a:outerShdw dist="35921" dir="2700000" algn="ctr" rotWithShape="0">
-                    <a:schemeClr val="bg2"/>
-                  </a:outerShdw>
-                </a:effectLst>
-              </a14:hiddenEffects>
-            </a:ext>
-          </a:extLst>
-        </p:spPr>
-        <p:txBody>
-          <a:bodyPr>
-            <a:spAutoFit/>
-          </a:bodyPr>
-          <a:lstStyle>
-            <a:lvl1pPr>
-              <a:spcBef>
-                <a:spcPct val="20000"/>
-              </a:spcBef>
-              <a:buChar char="•"/>
-              <a:defRPr sz="3200">
-                <a:solidFill>
-                  <a:schemeClr val="tx1"/>
-                </a:solidFill>
-                <a:latin typeface="Times New Roman" panose="02020603050405020304" pitchFamily="18" charset="0"/>
-              </a:defRPr>
-            </a:lvl1pPr>
-            <a:lvl2pPr marL="742950" indent="-285750">
-              <a:spcBef>
-                <a:spcPct val="20000"/>
-              </a:spcBef>
-              <a:buChar char="–"/>
-              <a:defRPr sz="2800">
-                <a:solidFill>
-                  <a:schemeClr val="tx1"/>
-                </a:solidFill>
-                <a:latin typeface="Times New Roman" panose="02020603050405020304" pitchFamily="18" charset="0"/>
-              </a:defRPr>
-            </a:lvl2pPr>
-            <a:lvl3pPr marL="1143000" indent="-228600">
-              <a:spcBef>
-                <a:spcPct val="20000"/>
-              </a:spcBef>
-              <a:buChar char="•"/>
-              <a:defRPr sz="2400">
-                <a:solidFill>
-                  <a:schemeClr val="tx1"/>
-                </a:solidFill>
-                <a:latin typeface="Times New Roman" panose="02020603050405020304" pitchFamily="18" charset="0"/>
-              </a:defRPr>
-            </a:lvl3pPr>
-            <a:lvl4pPr marL="1600200" indent="-228600">
-              <a:spcBef>
-                <a:spcPct val="20000"/>
-              </a:spcBef>
-              <a:buChar char="–"/>
-              <a:defRPr sz="2000">
-                <a:solidFill>
-                  <a:schemeClr val="tx1"/>
-                </a:solidFill>
-                <a:latin typeface="Times New Roman" panose="02020603050405020304" pitchFamily="18" charset="0"/>
-              </a:defRPr>
-            </a:lvl4pPr>
-            <a:lvl5pPr marL="2057400" indent="-228600">
-              <a:spcBef>
-                <a:spcPct val="20000"/>
-              </a:spcBef>
-              <a:buChar char="•"/>
-              <a:defRPr sz="2000">
-                <a:solidFill>
-                  <a:schemeClr val="tx1"/>
-                </a:solidFill>
-                <a:latin typeface="Times New Roman" panose="02020603050405020304" pitchFamily="18" charset="0"/>
-              </a:defRPr>
-            </a:lvl5pPr>
-            <a:lvl6pPr marL="2514600" indent="-228600" eaLnBrk="0" fontAlgn="base" hangingPunct="0">
-              <a:spcBef>
-                <a:spcPct val="20000"/>
-              </a:spcBef>
-              <a:spcAft>
-                <a:spcPct val="0"/>
-              </a:spcAft>
-              <a:buChar char="•"/>
-              <a:defRPr sz="2000">
-                <a:solidFill>
-                  <a:schemeClr val="tx1"/>
-                </a:solidFill>
-                <a:latin typeface="Times New Roman" panose="02020603050405020304" pitchFamily="18" charset="0"/>
-              </a:defRPr>
-            </a:lvl6pPr>
-            <a:lvl7pPr marL="2971800" indent="-228600" eaLnBrk="0" fontAlgn="base" hangingPunct="0">
-              <a:spcBef>
-                <a:spcPct val="20000"/>
-              </a:spcBef>
-              <a:spcAft>
-                <a:spcPct val="0"/>
-              </a:spcAft>
-              <a:buChar char="•"/>
-              <a:defRPr sz="2000">
-                <a:solidFill>
-                  <a:schemeClr val="tx1"/>
-                </a:solidFill>
-                <a:latin typeface="Times New Roman" panose="02020603050405020304" pitchFamily="18" charset="0"/>
-              </a:defRPr>
-            </a:lvl7pPr>
-            <a:lvl8pPr marL="3429000" indent="-228600" eaLnBrk="0" fontAlgn="base" hangingPunct="0">
-              <a:spcBef>
-                <a:spcPct val="20000"/>
-              </a:spcBef>
-              <a:spcAft>
-                <a:spcPct val="0"/>
-              </a:spcAft>
-              <a:buChar char="•"/>
-              <a:defRPr sz="2000">
-                <a:solidFill>
-                  <a:schemeClr val="tx1"/>
-                </a:solidFill>
-                <a:latin typeface="Times New Roman" panose="02020603050405020304" pitchFamily="18" charset="0"/>
-              </a:defRPr>
-            </a:lvl8pPr>
-            <a:lvl9pPr marL="3886200" indent="-228600" eaLnBrk="0" fontAlgn="base" hangingPunct="0">
-              <a:spcBef>
-                <a:spcPct val="20000"/>
-              </a:spcBef>
-              <a:spcAft>
-                <a:spcPct val="0"/>
-              </a:spcAft>
-              <a:buChar char="•"/>
-              <a:defRPr sz="2000">
-                <a:solidFill>
-                  <a:schemeClr val="tx1"/>
-                </a:solidFill>
-                <a:latin typeface="Times New Roman" panose="02020603050405020304" pitchFamily="18" charset="0"/>
-              </a:defRPr>
-            </a:lvl9pPr>
-          </a:lstStyle>
-          <a:p>
-            <a:pPr eaLnBrk="1" hangingPunct="1">
-              <a:spcBef>
-                <a:spcPct val="50000"/>
-              </a:spcBef>
-              <a:buFontTx/>
-              <a:buNone/>
-            </a:pPr>
-            <a:r>
-              <a:rPr lang="en-US" altLang="en-US" sz="2000" b="1">
-                <a:latin typeface="Tahoma" panose="020B0604030504040204" pitchFamily="34" charset="0"/>
-              </a:rPr>
-              <a:t>10</a:t>
-            </a:r>
-          </a:p>
-        </p:txBody>
-      </p:sp>
-      <p:sp>
-        <p:nvSpPr>
-          <p:cNvPr id="58377" name="Rectangle 9">
-            <a:extLst>
-              <a:ext uri="{FF2B5EF4-FFF2-40B4-BE49-F238E27FC236}">
-                <a16:creationId xmlns:a16="http://schemas.microsoft.com/office/drawing/2014/main" id="{576C1B39-E1CD-4B84-9CC8-7FA128BBEBC4}"/>
-              </a:ext>
-            </a:extLst>
-          </p:cNvPr>
-          <p:cNvSpPr>
-            <a:spLocks noChangeArrowheads="1"/>
-          </p:cNvSpPr>
-          <p:nvPr/>
-        </p:nvSpPr>
-        <p:spPr bwMode="auto">
-          <a:xfrm>
-            <a:off x="6781800" y="4572000"/>
-            <a:ext cx="457200" cy="533400"/>
-          </a:xfrm>
-          <a:prstGeom prst="rect">
-            <a:avLst/>
-          </a:prstGeom>
-          <a:solidFill>
-            <a:srgbClr val="FFFF99"/>
-          </a:solidFill>
-          <a:ln w="12700">
-            <a:solidFill>
-              <a:schemeClr val="tx1"/>
-            </a:solidFill>
-            <a:miter lim="800000"/>
-            <a:headEnd type="none" w="sm" len="sm"/>
-            <a:tailEnd type="none" w="sm" len="sm"/>
-          </a:ln>
-          <a:effectLst/>
-          <a:extLst>
-            <a:ext uri="{AF507438-7753-43E0-B8FC-AC1667EBCBE1}">
-              <a14:hiddenEffects xmlns:a14="http://schemas.microsoft.com/office/drawing/2010/main">
-                <a:effectLst>
-                  <a:outerShdw dist="35921" dir="2700000" algn="ctr" rotWithShape="0">
-                    <a:schemeClr val="bg2"/>
-                  </a:outerShdw>
-                </a:effectLst>
-              </a14:hiddenEffects>
-            </a:ext>
-          </a:extLst>
-        </p:spPr>
-        <p:txBody>
-          <a:bodyPr wrap="none" anchor="ctr"/>
-          <a:lstStyle>
-            <a:lvl1pPr>
-              <a:spcBef>
-                <a:spcPct val="20000"/>
-              </a:spcBef>
-              <a:buChar char="•"/>
-              <a:defRPr sz="3200">
-                <a:solidFill>
-                  <a:schemeClr val="tx1"/>
-                </a:solidFill>
-                <a:latin typeface="Times New Roman" panose="02020603050405020304" pitchFamily="18" charset="0"/>
-              </a:defRPr>
-            </a:lvl1pPr>
-            <a:lvl2pPr marL="742950" indent="-285750">
-              <a:spcBef>
-                <a:spcPct val="20000"/>
-              </a:spcBef>
-              <a:buChar char="–"/>
-              <a:defRPr sz="2800">
-                <a:solidFill>
-                  <a:schemeClr val="tx1"/>
-                </a:solidFill>
-                <a:latin typeface="Times New Roman" panose="02020603050405020304" pitchFamily="18" charset="0"/>
-              </a:defRPr>
-            </a:lvl2pPr>
-            <a:lvl3pPr marL="1143000" indent="-228600">
-              <a:spcBef>
-                <a:spcPct val="20000"/>
-              </a:spcBef>
-              <a:buChar char="•"/>
-              <a:defRPr sz="2400">
-                <a:solidFill>
-                  <a:schemeClr val="tx1"/>
-                </a:solidFill>
-                <a:latin typeface="Times New Roman" panose="02020603050405020304" pitchFamily="18" charset="0"/>
-              </a:defRPr>
-            </a:lvl3pPr>
-            <a:lvl4pPr marL="1600200" indent="-228600">
-              <a:spcBef>
-                <a:spcPct val="20000"/>
-              </a:spcBef>
-              <a:buChar char="–"/>
-              <a:defRPr sz="2000">
-                <a:solidFill>
-                  <a:schemeClr val="tx1"/>
-                </a:solidFill>
-                <a:latin typeface="Times New Roman" panose="02020603050405020304" pitchFamily="18" charset="0"/>
-              </a:defRPr>
-            </a:lvl4pPr>
-            <a:lvl5pPr marL="2057400" indent="-228600">
-              <a:spcBef>
-                <a:spcPct val="20000"/>
-              </a:spcBef>
-              <a:buChar char="•"/>
-              <a:defRPr sz="2000">
-                <a:solidFill>
-                  <a:schemeClr val="tx1"/>
-                </a:solidFill>
-                <a:latin typeface="Times New Roman" panose="02020603050405020304" pitchFamily="18" charset="0"/>
-              </a:defRPr>
-            </a:lvl5pPr>
-            <a:lvl6pPr marL="2514600" indent="-228600" eaLnBrk="0" fontAlgn="base" hangingPunct="0">
-              <a:spcBef>
-                <a:spcPct val="20000"/>
-              </a:spcBef>
-              <a:spcAft>
-                <a:spcPct val="0"/>
-              </a:spcAft>
-              <a:buChar char="•"/>
-              <a:defRPr sz="2000">
-                <a:solidFill>
-                  <a:schemeClr val="tx1"/>
-                </a:solidFill>
-                <a:latin typeface="Times New Roman" panose="02020603050405020304" pitchFamily="18" charset="0"/>
-              </a:defRPr>
-            </a:lvl6pPr>
-            <a:lvl7pPr marL="2971800" indent="-228600" eaLnBrk="0" fontAlgn="base" hangingPunct="0">
-              <a:spcBef>
-                <a:spcPct val="20000"/>
-              </a:spcBef>
-              <a:spcAft>
-                <a:spcPct val="0"/>
-              </a:spcAft>
-              <a:buChar char="•"/>
-              <a:defRPr sz="2000">
-                <a:solidFill>
-                  <a:schemeClr val="tx1"/>
-                </a:solidFill>
-                <a:latin typeface="Times New Roman" panose="02020603050405020304" pitchFamily="18" charset="0"/>
-              </a:defRPr>
-            </a:lvl7pPr>
-            <a:lvl8pPr marL="3429000" indent="-228600" eaLnBrk="0" fontAlgn="base" hangingPunct="0">
-              <a:spcBef>
-                <a:spcPct val="20000"/>
-              </a:spcBef>
-              <a:spcAft>
-                <a:spcPct val="0"/>
-              </a:spcAft>
-              <a:buChar char="•"/>
-              <a:defRPr sz="2000">
-                <a:solidFill>
-                  <a:schemeClr val="tx1"/>
-                </a:solidFill>
-                <a:latin typeface="Times New Roman" panose="02020603050405020304" pitchFamily="18" charset="0"/>
-              </a:defRPr>
-            </a:lvl8pPr>
-            <a:lvl9pPr marL="3886200" indent="-228600" eaLnBrk="0" fontAlgn="base" hangingPunct="0">
-              <a:spcBef>
-                <a:spcPct val="20000"/>
-              </a:spcBef>
-              <a:spcAft>
-                <a:spcPct val="0"/>
-              </a:spcAft>
-              <a:buChar char="•"/>
-              <a:defRPr sz="2000">
-                <a:solidFill>
-                  <a:schemeClr val="tx1"/>
-                </a:solidFill>
-                <a:latin typeface="Times New Roman" panose="02020603050405020304" pitchFamily="18" charset="0"/>
-              </a:defRPr>
-            </a:lvl9pPr>
-          </a:lstStyle>
-          <a:p>
-            <a:pPr eaLnBrk="1" hangingPunct="1">
-              <a:spcBef>
-                <a:spcPct val="0"/>
-              </a:spcBef>
-              <a:buFontTx/>
-              <a:buNone/>
-            </a:pPr>
-            <a:endParaRPr lang="en-US" altLang="en-US" sz="2800">
-              <a:latin typeface="Tahoma" panose="020B0604030504040204" pitchFamily="34" charset="0"/>
-            </a:endParaRPr>
-          </a:p>
-        </p:txBody>
-      </p:sp>
-      <p:sp>
-        <p:nvSpPr>
-          <p:cNvPr id="2" name="Text Box 15">
-            <a:extLst>
-              <a:ext uri="{FF2B5EF4-FFF2-40B4-BE49-F238E27FC236}">
-                <a16:creationId xmlns:a16="http://schemas.microsoft.com/office/drawing/2014/main" id="{3FD83581-C423-62D5-A60E-F8CBB5194B0A}"/>
-              </a:ext>
-            </a:extLst>
-          </p:cNvPr>
-          <p:cNvSpPr txBox="1">
-            <a:spLocks noChangeArrowheads="1"/>
-          </p:cNvSpPr>
-          <p:nvPr/>
-        </p:nvSpPr>
-        <p:spPr bwMode="auto">
-          <a:xfrm>
-            <a:off x="6747435" y="4648200"/>
-            <a:ext cx="609600" cy="338554"/>
-          </a:xfrm>
-          <a:prstGeom prst="rect">
-            <a:avLst/>
-          </a:prstGeom>
-          <a:noFill/>
-          <a:ln>
-            <a:noFill/>
-          </a:ln>
-          <a:effectLst/>
-          <a:extLst>
-            <a:ext uri="{909E8E84-426E-40DD-AFC4-6F175D3DCCD1}">
-              <a14:hiddenFill xmlns:a14="http://schemas.microsoft.com/office/drawing/2010/main">
-                <a:solidFill>
-                  <a:schemeClr val="accent1"/>
-                </a:solidFill>
-              </a14:hiddenFill>
-            </a:ext>
-            <a:ext uri="{91240B29-F687-4F45-9708-019B960494DF}">
-              <a14:hiddenLine xmlns:a14="http://schemas.microsoft.com/office/drawing/2010/main" w="12700">
-                <a:solidFill>
-                  <a:schemeClr val="tx1"/>
-                </a:solidFill>
-                <a:miter lim="800000"/>
-                <a:headEnd type="none" w="sm" len="sm"/>
-                <a:tailEnd type="none" w="sm" len="sm"/>
-              </a14:hiddenLine>
-            </a:ext>
-            <a:ext uri="{AF507438-7753-43E0-B8FC-AC1667EBCBE1}">
-              <a14:hiddenEffects xmlns:a14="http://schemas.microsoft.com/office/drawing/2010/main">
-                <a:effectLst>
-                  <a:outerShdw dist="35921" dir="2700000" algn="ctr" rotWithShape="0">
-                    <a:schemeClr val="bg2"/>
-                  </a:outerShdw>
-                </a:effectLst>
-              </a14:hiddenEffects>
-            </a:ext>
-          </a:extLst>
-        </p:spPr>
-        <p:txBody>
-          <a:bodyPr wrap="square">
-            <a:spAutoFit/>
-          </a:bodyPr>
-          <a:lstStyle>
-            <a:lvl1pPr>
-              <a:spcBef>
-                <a:spcPct val="20000"/>
-              </a:spcBef>
-              <a:buChar char="•"/>
-              <a:defRPr sz="3200">
-                <a:solidFill>
-                  <a:schemeClr val="tx1"/>
-                </a:solidFill>
-                <a:latin typeface="Times New Roman" panose="02020603050405020304" pitchFamily="18" charset="0"/>
-              </a:defRPr>
-            </a:lvl1pPr>
-            <a:lvl2pPr marL="742950" indent="-285750">
-              <a:spcBef>
-                <a:spcPct val="20000"/>
-              </a:spcBef>
-              <a:buChar char="–"/>
-              <a:defRPr sz="2800">
-                <a:solidFill>
-                  <a:schemeClr val="tx1"/>
-                </a:solidFill>
-                <a:latin typeface="Times New Roman" panose="02020603050405020304" pitchFamily="18" charset="0"/>
-              </a:defRPr>
-            </a:lvl2pPr>
-            <a:lvl3pPr marL="1143000" indent="-228600">
-              <a:spcBef>
-                <a:spcPct val="20000"/>
-              </a:spcBef>
-              <a:buChar char="•"/>
-              <a:defRPr sz="2400">
-                <a:solidFill>
-                  <a:schemeClr val="tx1"/>
-                </a:solidFill>
-                <a:latin typeface="Times New Roman" panose="02020603050405020304" pitchFamily="18" charset="0"/>
-              </a:defRPr>
-            </a:lvl3pPr>
-            <a:lvl4pPr marL="1600200" indent="-228600">
-              <a:spcBef>
-                <a:spcPct val="20000"/>
-              </a:spcBef>
-              <a:buChar char="–"/>
-              <a:defRPr sz="2000">
-                <a:solidFill>
-                  <a:schemeClr val="tx1"/>
-                </a:solidFill>
-                <a:latin typeface="Times New Roman" panose="02020603050405020304" pitchFamily="18" charset="0"/>
-              </a:defRPr>
-            </a:lvl4pPr>
-            <a:lvl5pPr marL="2057400" indent="-228600">
-              <a:spcBef>
-                <a:spcPct val="20000"/>
-              </a:spcBef>
-              <a:buChar char="•"/>
-              <a:defRPr sz="2000">
-                <a:solidFill>
-                  <a:schemeClr val="tx1"/>
-                </a:solidFill>
-                <a:latin typeface="Times New Roman" panose="02020603050405020304" pitchFamily="18" charset="0"/>
-              </a:defRPr>
-            </a:lvl5pPr>
-            <a:lvl6pPr marL="2514600" indent="-228600" eaLnBrk="0" fontAlgn="base" hangingPunct="0">
-              <a:spcBef>
-                <a:spcPct val="20000"/>
-              </a:spcBef>
-              <a:spcAft>
-                <a:spcPct val="0"/>
-              </a:spcAft>
-              <a:buChar char="•"/>
-              <a:defRPr sz="2000">
-                <a:solidFill>
-                  <a:schemeClr val="tx1"/>
-                </a:solidFill>
-                <a:latin typeface="Times New Roman" panose="02020603050405020304" pitchFamily="18" charset="0"/>
-              </a:defRPr>
-            </a:lvl6pPr>
-            <a:lvl7pPr marL="2971800" indent="-228600" eaLnBrk="0" fontAlgn="base" hangingPunct="0">
-              <a:spcBef>
-                <a:spcPct val="20000"/>
-              </a:spcBef>
-              <a:spcAft>
-                <a:spcPct val="0"/>
-              </a:spcAft>
-              <a:buChar char="•"/>
-              <a:defRPr sz="2000">
-                <a:solidFill>
-                  <a:schemeClr val="tx1"/>
-                </a:solidFill>
-                <a:latin typeface="Times New Roman" panose="02020603050405020304" pitchFamily="18" charset="0"/>
-              </a:defRPr>
-            </a:lvl7pPr>
-            <a:lvl8pPr marL="3429000" indent="-228600" eaLnBrk="0" fontAlgn="base" hangingPunct="0">
-              <a:spcBef>
-                <a:spcPct val="20000"/>
-              </a:spcBef>
-              <a:spcAft>
-                <a:spcPct val="0"/>
-              </a:spcAft>
-              <a:buChar char="•"/>
-              <a:defRPr sz="2000">
-                <a:solidFill>
-                  <a:schemeClr val="tx1"/>
-                </a:solidFill>
-                <a:latin typeface="Times New Roman" panose="02020603050405020304" pitchFamily="18" charset="0"/>
-              </a:defRPr>
-            </a:lvl8pPr>
-            <a:lvl9pPr marL="3886200" indent="-228600" eaLnBrk="0" fontAlgn="base" hangingPunct="0">
-              <a:spcBef>
-                <a:spcPct val="20000"/>
-              </a:spcBef>
-              <a:spcAft>
-                <a:spcPct val="0"/>
-              </a:spcAft>
-              <a:buChar char="•"/>
-              <a:defRPr sz="2000">
-                <a:solidFill>
-                  <a:schemeClr val="tx1"/>
-                </a:solidFill>
-                <a:latin typeface="Times New Roman" panose="02020603050405020304" pitchFamily="18" charset="0"/>
-              </a:defRPr>
-            </a:lvl9pPr>
-          </a:lstStyle>
-          <a:p>
-            <a:pPr eaLnBrk="1" hangingPunct="1">
-              <a:spcBef>
-                <a:spcPct val="50000"/>
-              </a:spcBef>
-              <a:buFontTx/>
-              <a:buNone/>
-            </a:pPr>
-            <a:r>
-              <a:rPr lang="en-US" altLang="en-US" sz="1600" b="1" dirty="0">
-                <a:latin typeface="Tahoma" panose="020B0604030504040204" pitchFamily="34" charset="0"/>
-              </a:rPr>
-              <a:t>null</a:t>
-            </a:r>
-          </a:p>
-        </p:txBody>
-      </p:sp>
-      <p:sp>
-        <p:nvSpPr>
-          <p:cNvPr id="3" name="Text Box 15">
-            <a:extLst>
-              <a:ext uri="{FF2B5EF4-FFF2-40B4-BE49-F238E27FC236}">
-                <a16:creationId xmlns:a16="http://schemas.microsoft.com/office/drawing/2014/main" id="{AC84A02D-D39F-FFD7-6015-A0963E42A21D}"/>
-              </a:ext>
-            </a:extLst>
-          </p:cNvPr>
-          <p:cNvSpPr txBox="1">
-            <a:spLocks noChangeArrowheads="1"/>
-          </p:cNvSpPr>
-          <p:nvPr/>
-        </p:nvSpPr>
-        <p:spPr bwMode="auto">
-          <a:xfrm>
-            <a:off x="7825441" y="4650282"/>
-            <a:ext cx="609600" cy="338554"/>
-          </a:xfrm>
-          <a:prstGeom prst="rect">
-            <a:avLst/>
-          </a:prstGeom>
-          <a:noFill/>
-          <a:ln>
-            <a:noFill/>
-          </a:ln>
-          <a:effectLst/>
-          <a:extLst>
-            <a:ext uri="{909E8E84-426E-40DD-AFC4-6F175D3DCCD1}">
-              <a14:hiddenFill xmlns:a14="http://schemas.microsoft.com/office/drawing/2010/main">
-                <a:solidFill>
-                  <a:schemeClr val="accent1"/>
-                </a:solidFill>
-              </a14:hiddenFill>
-            </a:ext>
-            <a:ext uri="{91240B29-F687-4F45-9708-019B960494DF}">
-              <a14:hiddenLine xmlns:a14="http://schemas.microsoft.com/office/drawing/2010/main" w="12700">
-                <a:solidFill>
-                  <a:schemeClr val="tx1"/>
-                </a:solidFill>
-                <a:miter lim="800000"/>
-                <a:headEnd type="none" w="sm" len="sm"/>
-                <a:tailEnd type="none" w="sm" len="sm"/>
-              </a14:hiddenLine>
-            </a:ext>
-            <a:ext uri="{AF507438-7753-43E0-B8FC-AC1667EBCBE1}">
-              <a14:hiddenEffects xmlns:a14="http://schemas.microsoft.com/office/drawing/2010/main">
-                <a:effectLst>
-                  <a:outerShdw dist="35921" dir="2700000" algn="ctr" rotWithShape="0">
-                    <a:schemeClr val="bg2"/>
-                  </a:outerShdw>
-                </a:effectLst>
-              </a14:hiddenEffects>
-            </a:ext>
-          </a:extLst>
-        </p:spPr>
-        <p:txBody>
-          <a:bodyPr wrap="square">
-            <a:spAutoFit/>
-          </a:bodyPr>
-          <a:lstStyle>
-            <a:lvl1pPr>
-              <a:spcBef>
-                <a:spcPct val="20000"/>
-              </a:spcBef>
-              <a:buChar char="•"/>
-              <a:defRPr sz="3200">
-                <a:solidFill>
-                  <a:schemeClr val="tx1"/>
-                </a:solidFill>
-                <a:latin typeface="Times New Roman" panose="02020603050405020304" pitchFamily="18" charset="0"/>
-              </a:defRPr>
-            </a:lvl1pPr>
-            <a:lvl2pPr marL="742950" indent="-285750">
-              <a:spcBef>
-                <a:spcPct val="20000"/>
-              </a:spcBef>
-              <a:buChar char="–"/>
-              <a:defRPr sz="2800">
-                <a:solidFill>
-                  <a:schemeClr val="tx1"/>
-                </a:solidFill>
-                <a:latin typeface="Times New Roman" panose="02020603050405020304" pitchFamily="18" charset="0"/>
-              </a:defRPr>
-            </a:lvl2pPr>
-            <a:lvl3pPr marL="1143000" indent="-228600">
-              <a:spcBef>
-                <a:spcPct val="20000"/>
-              </a:spcBef>
-              <a:buChar char="•"/>
-              <a:defRPr sz="2400">
-                <a:solidFill>
-                  <a:schemeClr val="tx1"/>
-                </a:solidFill>
-                <a:latin typeface="Times New Roman" panose="02020603050405020304" pitchFamily="18" charset="0"/>
-              </a:defRPr>
-            </a:lvl3pPr>
-            <a:lvl4pPr marL="1600200" indent="-228600">
-              <a:spcBef>
-                <a:spcPct val="20000"/>
-              </a:spcBef>
-              <a:buChar char="–"/>
-              <a:defRPr sz="2000">
-                <a:solidFill>
-                  <a:schemeClr val="tx1"/>
-                </a:solidFill>
-                <a:latin typeface="Times New Roman" panose="02020603050405020304" pitchFamily="18" charset="0"/>
-              </a:defRPr>
-            </a:lvl4pPr>
-            <a:lvl5pPr marL="2057400" indent="-228600">
-              <a:spcBef>
-                <a:spcPct val="20000"/>
-              </a:spcBef>
-              <a:buChar char="•"/>
-              <a:defRPr sz="2000">
-                <a:solidFill>
-                  <a:schemeClr val="tx1"/>
-                </a:solidFill>
-                <a:latin typeface="Times New Roman" panose="02020603050405020304" pitchFamily="18" charset="0"/>
-              </a:defRPr>
-            </a:lvl5pPr>
-            <a:lvl6pPr marL="2514600" indent="-228600" eaLnBrk="0" fontAlgn="base" hangingPunct="0">
-              <a:spcBef>
-                <a:spcPct val="20000"/>
-              </a:spcBef>
-              <a:spcAft>
-                <a:spcPct val="0"/>
-              </a:spcAft>
-              <a:buChar char="•"/>
-              <a:defRPr sz="2000">
-                <a:solidFill>
-                  <a:schemeClr val="tx1"/>
-                </a:solidFill>
-                <a:latin typeface="Times New Roman" panose="02020603050405020304" pitchFamily="18" charset="0"/>
-              </a:defRPr>
-            </a:lvl6pPr>
-            <a:lvl7pPr marL="2971800" indent="-228600" eaLnBrk="0" fontAlgn="base" hangingPunct="0">
-              <a:spcBef>
-                <a:spcPct val="20000"/>
-              </a:spcBef>
-              <a:spcAft>
-                <a:spcPct val="0"/>
-              </a:spcAft>
-              <a:buChar char="•"/>
-              <a:defRPr sz="2000">
-                <a:solidFill>
-                  <a:schemeClr val="tx1"/>
-                </a:solidFill>
-                <a:latin typeface="Times New Roman" panose="02020603050405020304" pitchFamily="18" charset="0"/>
-              </a:defRPr>
-            </a:lvl7pPr>
-            <a:lvl8pPr marL="3429000" indent="-228600" eaLnBrk="0" fontAlgn="base" hangingPunct="0">
-              <a:spcBef>
-                <a:spcPct val="20000"/>
-              </a:spcBef>
-              <a:spcAft>
-                <a:spcPct val="0"/>
-              </a:spcAft>
-              <a:buChar char="•"/>
-              <a:defRPr sz="2000">
-                <a:solidFill>
-                  <a:schemeClr val="tx1"/>
-                </a:solidFill>
-                <a:latin typeface="Times New Roman" panose="02020603050405020304" pitchFamily="18" charset="0"/>
-              </a:defRPr>
-            </a:lvl8pPr>
-            <a:lvl9pPr marL="3886200" indent="-228600" eaLnBrk="0" fontAlgn="base" hangingPunct="0">
-              <a:spcBef>
-                <a:spcPct val="20000"/>
-              </a:spcBef>
-              <a:spcAft>
-                <a:spcPct val="0"/>
-              </a:spcAft>
-              <a:buChar char="•"/>
-              <a:defRPr sz="2000">
-                <a:solidFill>
-                  <a:schemeClr val="tx1"/>
-                </a:solidFill>
-                <a:latin typeface="Times New Roman" panose="02020603050405020304" pitchFamily="18" charset="0"/>
-              </a:defRPr>
-            </a:lvl9pPr>
-          </a:lstStyle>
-          <a:p>
-            <a:pPr eaLnBrk="1" hangingPunct="1">
-              <a:spcBef>
-                <a:spcPct val="50000"/>
-              </a:spcBef>
-              <a:buFontTx/>
-              <a:buNone/>
-            </a:pPr>
-            <a:r>
-              <a:rPr lang="en-US" altLang="en-US" sz="1600" b="1" dirty="0">
-                <a:latin typeface="Tahoma" panose="020B0604030504040204" pitchFamily="34" charset="0"/>
-              </a:rPr>
-              <a:t>null</a:t>
-            </a:r>
           </a:p>
         </p:txBody>
       </p:sp>
